--- a/Miercoles-17/S02_Miercoles-17_1_Carrusel_Que-es-un-QR_9x16.pptx
+++ b/Miercoles-17/S02_Miercoles-17_1_Carrusel_Que-es-un-QR_9x16.pptx
@@ -3178,7 +3178,7 @@
         <p:spPr>
           <a:xfrm>
             <a:off x="777240" y="777240"/>
-            <a:ext cx="1012698" cy="373380"/>
+            <a:ext cx="1515618" cy="373380"/>
           </a:xfrm>
           <a:prstGeom prst="roundRect">
             <a:avLst>
@@ -3219,7 +3219,7 @@
                 </a:solidFill>
                 <a:latin typeface="Inter"/>
               </a:rPr>
-              <a:t>PISTA</a:t>
+              <a:t>SEGURIDAD</a:t>
             </a:r>
           </a:p>
         </p:txBody>
@@ -3784,7 +3784,7 @@
                 </a:solidFill>
                 <a:latin typeface="Inter"/>
               </a:rPr>
-              <a:t>22 de junio.</a:t>
+              <a:t>Míralo en notaly.com.ve</a:t>
             </a:r>
           </a:p>
         </p:txBody>

--- a/Miercoles-17/S02_Miercoles-17_1_Carrusel_Que-es-un-QR_9x16.pptx
+++ b/Miercoles-17/S02_Miercoles-17_1_Carrusel_Que-es-un-QR_9x16.pptx
@@ -3784,7 +3784,7 @@
                 </a:solidFill>
                 <a:latin typeface="Inter"/>
               </a:rPr>
-              <a:t>Míralo en notaly.com.ve</a:t>
+              <a:t>Más en notaly.com.ve</a:t>
             </a:r>
           </a:p>
         </p:txBody>
